--- a/presentation/defense_fa.pptx
+++ b/presentation/defense_fa.pptx
@@ -2247,7 +2247,7 @@
           <a:lstStyle xmlns:a="http://schemas.openxmlformats.org/drawingml/2006/main"/>
           <a:p xmlns:a="http://schemas.openxmlformats.org/drawingml/2006/main">
             <a:r>
-              <a:t>در پاسخ به پرسش پیاده‌سازی، ساختار مخزن را نشان دهید: src/ksa کتابخانه؛ scripts اجرا و راستی‌آزمایی؛ benchmarks آزمون MGP-6؛ artifacts و reports دفتر نتایج و ممیزی.</a:t>
+              <a:t>در پاسخ به پرسش پیاده‌سازی، ساختار مخزن را نشان دهید: src/ask کتابخانه؛ scripts اجرا و راستی‌آزمایی؛ benchmarks آزمون MGP-6؛ artifacts و reports دفتر نتایج و ممیزی.</a:t>
             </a:r>
           </a:p>
         </p:txBody>
@@ -3301,10 +3301,10 @@
                 <c:v>بدون مثال</c:v>
               </c:pt>
               <c:pt idx="5">
-                <c:v>KSA مدل</c:v>
+                <c:v>ASK مدل</c:v>
               </c:pt>
               <c:pt idx="6">
-                <c:v>KSA قاعده</c:v>
+                <c:v>ASK قاعده</c:v>
               </c:pt>
             </c:strLit>
           </c:cat>
@@ -3956,7 +3956,7 @@
                 <a:ea typeface="Arial"/>
                 <a:cs typeface="Arial"/>
               </a:rPr>
-              <a:t>علی محمدی · سامانهٔ حاکمیت حافظهٔ KSA · ۲۰۲۶</a:t>
+              <a:t>علی محمدی · سامانهٔ حاکمیت حافظهٔ ASK · ۲۰۲۶</a:t>
             </a:r>
           </a:p>
         </p:txBody>
@@ -4931,7 +4931,7 @@
                 <a:ea typeface="Arial"/>
                 <a:cs typeface="Arial"/>
               </a:rPr>
-              <a:t>KSA قاعده‌ای در برابر تصمیم بدون ساختار. p اصلاح‌شدهٔ Holm برابر 1.6×10⁻⁵ است.</a:t>
+              <a:t>ASK قاعده‌ای در برابر تصمیم بدون ساختار. p اصلاح‌شدهٔ Holm برابر 1.6×10⁻⁵ است.</a:t>
             </a:r>
           </a:p>
           <a:p xmlns:a="http://schemas.openxmlformats.org/drawingml/2006/main">
@@ -6140,7 +6140,7 @@
                           <a:ea typeface="Arial"/>
                           <a:cs typeface="Arial"/>
                         </a:rPr>
-                        <a:t>KSA کامل</a:t>
+                        <a:t>ASK کامل</a:t>
                       </a:r>
                     </a:p>
                   </a:txBody>
@@ -6924,7 +6924,7 @@
                 <a:ea typeface="Arial"/>
                 <a:cs typeface="Arial"/>
               </a:rPr>
-              <a:t>این رابط‌ها معنای کنش KSA را مستقیماً ارائه نمی‌کنند. هر دو نگاشت باید گزارش شود.</a:t>
+              <a:t>این رابط‌ها معنای کنش ASK را مستقیماً ارائه نمی‌کنند. هر دو نگاشت باید گزارش شود.</a:t>
             </a:r>
           </a:p>
           <a:p xmlns:a="http://schemas.openxmlformats.org/drawingml/2006/main">
@@ -9758,7 +9758,7 @@
                 <a:ea typeface="Arial"/>
                 <a:cs typeface="Arial"/>
               </a:rPr>
-              <a:t>KSA قاعده‌ای</a:t>
+              <a:t>ASK قاعده‌ای</a:t>
             </a:r>
           </a:p>
         </p:txBody>
@@ -12875,7 +12875,7 @@
                           <a:ea typeface="Arial"/>
                           <a:cs typeface="Arial"/>
                         </a:rPr>
-                        <a:t>KSA قاعده</a:t>
+                        <a:t>ASK قاعده</a:t>
                       </a:r>
                     </a:p>
                   </a:txBody>
@@ -12977,7 +12977,7 @@
                           <a:ea typeface="Arial"/>
                           <a:cs typeface="Arial"/>
                         </a:rPr>
-                        <a:t>KSA مدل</a:t>
+                        <a:t>ASK مدل</a:t>
                       </a:r>
                     </a:p>
                   </a:txBody>
@@ -13510,7 +13510,7 @@
                           <a:ea typeface="Arial"/>
                           <a:cs typeface="Arial"/>
                         </a:rPr>
-                        <a:t>قاعده در برابر KSA مدل</a:t>
+                        <a:t>قاعده در برابر ASK مدل</a:t>
                       </a:r>
                     </a:p>
                   </a:txBody>
@@ -16288,7 +16288,7 @@
                           <a:ea typeface="Arial"/>
                           <a:cs typeface="Arial"/>
                         </a:rPr>
-                        <a:t>فاقد معنای خودداری KSA</a:t>
+                        <a:t>فاقد معنای خودداری ASK</a:t>
                       </a:r>
                     </a:p>
                   </a:txBody>
@@ -16922,7 +16922,7 @@
                           <a:ea typeface="Arial"/>
                           <a:cs typeface="Arial"/>
                         </a:rPr>
-                        <a:t>تفاوت با ترکیب ارزیابی‌شدهٔ KSA</a:t>
+                        <a:t>تفاوت با ترکیب ارزیابی‌شدهٔ ASK</a:t>
                       </a:r>
                     </a:p>
                   </a:txBody>
@@ -19061,7 +19061,7 @@
                           <a:ea typeface="Arial"/>
                           <a:cs typeface="Arial"/>
                         </a:rPr>
-                        <a:t>KSA قاعده</a:t>
+                        <a:t>ASK قاعده</a:t>
                       </a:r>
                     </a:p>
                   </a:txBody>
@@ -19188,7 +19188,7 @@
                           <a:ea typeface="Arial"/>
                           <a:cs typeface="Arial"/>
                         </a:rPr>
-                        <a:t>KSA مدل</a:t>
+                        <a:t>ASK مدل</a:t>
                       </a:r>
                     </a:p>
                   </a:txBody>
@@ -20755,7 +20755,7 @@
                 <a:ea typeface="Arial"/>
                 <a:cs typeface="Arial"/>
               </a:rPr>
-              <a:t>منبع: src/ksa؛ scripts/evaluation؛ tests؛ ردیابی رفتار به کد</a:t>
+              <a:t>منبع: src/ask؛ scripts/evaluation؛ tests؛ ردیابی رفتار به کد</a:t>
             </a:r>
           </a:p>
         </p:txBody>
@@ -22066,7 +22066,7 @@
                 <a:ea typeface="Arial"/>
                 <a:cs typeface="Arial"/>
               </a:rPr>
-              <a:t>منبع: فصل‌های ۳ و ۴ پایان‌نامه؛ src/ksa/memory/operations.py</a:t>
+              <a:t>منبع: فصل‌های ۳ و ۴ پایان‌نامه؛ src/ask/memory/operations.py</a:t>
             </a:r>
           </a:p>
         </p:txBody>
@@ -22153,7 +22153,7 @@
                 <a:ea typeface="Arial"/>
                 <a:cs typeface="Arial"/>
               </a:rPr>
-              <a:t>KSA پیشنهاد مدل را درون یک مرز حاکمیت قطعی قرار می‌دهد</a:t>
+              <a:t>ASK پیشنهاد مدل را درون یک مرز حاکمیت قطعی قرار می‌دهد</a:t>
             </a:r>
           </a:p>
         </p:txBody>
@@ -23184,7 +23184,7 @@
                 <a:ea typeface="Arial"/>
                 <a:cs typeface="Arial"/>
               </a:rPr>
-              <a:t>منبع: src/ksa/pipeline/orchestrator.py و شکل معماری مخزن</a:t>
+              <a:t>منبع: src/ask/pipeline/orchestrator.py و شکل معماری مخزن</a:t>
             </a:r>
           </a:p>
         </p:txBody>
@@ -23887,7 +23887,7 @@
                 <a:ea typeface="Arial"/>
                 <a:cs typeface="Arial"/>
               </a:rPr>
-              <a:t>منبع: src/ksa/controller/policy.py و scoring.py</a:t>
+              <a:t>منبع: src/ask/controller/policy.py و scoring.py</a:t>
             </a:r>
           </a:p>
         </p:txBody>
